--- a/Docs/Inception/Presentation Slides.pptx
+++ b/Docs/Inception/Presentation Slides.pptx
@@ -319,7 +319,7 @@
           <a:p>
             <a:fld id="{5BCAD085-E8A6-8845-BD4E-CB4CCA059FC4}" type="datetimeFigureOut">
               <a:rPr lang="en-US" smtClean="0"/>
-              <a:t>2/20/2026</a:t>
+              <a:t>2/26/2026</a:t>
             </a:fld>
             <a:endParaRPr lang="en-US"/>
           </a:p>
@@ -594,7 +594,7 @@
           <a:p>
             <a:fld id="{5BCAD085-E8A6-8845-BD4E-CB4CCA059FC4}" type="datetimeFigureOut">
               <a:rPr lang="en-US" smtClean="0"/>
-              <a:t>2/20/2026</a:t>
+              <a:t>2/26/2026</a:t>
             </a:fld>
             <a:endParaRPr lang="en-US"/>
           </a:p>
@@ -788,7 +788,7 @@
           <a:p>
             <a:fld id="{5BCAD085-E8A6-8845-BD4E-CB4CCA059FC4}" type="datetimeFigureOut">
               <a:rPr lang="en-US" smtClean="0"/>
-              <a:t>2/20/2026</a:t>
+              <a:t>2/26/2026</a:t>
             </a:fld>
             <a:endParaRPr lang="en-US"/>
           </a:p>
@@ -1061,7 +1061,7 @@
           <a:p>
             <a:fld id="{5BCAD085-E8A6-8845-BD4E-CB4CCA059FC4}" type="datetimeFigureOut">
               <a:rPr lang="en-US" smtClean="0"/>
-              <a:t>2/20/2026</a:t>
+              <a:t>2/26/2026</a:t>
             </a:fld>
             <a:endParaRPr lang="en-US"/>
           </a:p>
@@ -1402,7 +1402,7 @@
           <a:p>
             <a:fld id="{5BCAD085-E8A6-8845-BD4E-CB4CCA059FC4}" type="datetimeFigureOut">
               <a:rPr lang="en-US" smtClean="0"/>
-              <a:t>2/20/2026</a:t>
+              <a:t>2/26/2026</a:t>
             </a:fld>
             <a:endParaRPr lang="en-US"/>
           </a:p>
@@ -2025,7 +2025,7 @@
           <a:p>
             <a:fld id="{5BCAD085-E8A6-8845-BD4E-CB4CCA059FC4}" type="datetimeFigureOut">
               <a:rPr lang="en-US" smtClean="0"/>
-              <a:t>2/20/2026</a:t>
+              <a:t>2/26/2026</a:t>
             </a:fld>
             <a:endParaRPr lang="en-US"/>
           </a:p>
@@ -2885,7 +2885,7 @@
           <a:p>
             <a:fld id="{5BCAD085-E8A6-8845-BD4E-CB4CCA059FC4}" type="datetimeFigureOut">
               <a:rPr lang="en-US" smtClean="0"/>
-              <a:t>2/20/2026</a:t>
+              <a:t>2/26/2026</a:t>
             </a:fld>
             <a:endParaRPr lang="en-US"/>
           </a:p>
@@ -3055,7 +3055,7 @@
           <a:p>
             <a:fld id="{5BCAD085-E8A6-8845-BD4E-CB4CCA059FC4}" type="datetimeFigureOut">
               <a:rPr lang="en-US" smtClean="0"/>
-              <a:t>2/20/2026</a:t>
+              <a:t>2/26/2026</a:t>
             </a:fld>
             <a:endParaRPr lang="en-US"/>
           </a:p>
@@ -3235,7 +3235,7 @@
           <a:p>
             <a:fld id="{5BCAD085-E8A6-8845-BD4E-CB4CCA059FC4}" type="datetimeFigureOut">
               <a:rPr lang="en-US" smtClean="0"/>
-              <a:t>2/20/2026</a:t>
+              <a:t>2/26/2026</a:t>
             </a:fld>
             <a:endParaRPr lang="en-US"/>
           </a:p>
@@ -3405,7 +3405,7 @@
           <a:p>
             <a:fld id="{5BCAD085-E8A6-8845-BD4E-CB4CCA059FC4}" type="datetimeFigureOut">
               <a:rPr lang="en-US" smtClean="0"/>
-              <a:t>2/20/2026</a:t>
+              <a:t>2/26/2026</a:t>
             </a:fld>
             <a:endParaRPr lang="en-US"/>
           </a:p>
@@ -3652,7 +3652,7 @@
           <a:p>
             <a:fld id="{5BCAD085-E8A6-8845-BD4E-CB4CCA059FC4}" type="datetimeFigureOut">
               <a:rPr lang="en-US" smtClean="0"/>
-              <a:t>2/20/2026</a:t>
+              <a:t>2/26/2026</a:t>
             </a:fld>
             <a:endParaRPr lang="en-US"/>
           </a:p>
@@ -3944,7 +3944,7 @@
           <a:p>
             <a:fld id="{5BCAD085-E8A6-8845-BD4E-CB4CCA059FC4}" type="datetimeFigureOut">
               <a:rPr lang="en-US" smtClean="0"/>
-              <a:t>2/20/2026</a:t>
+              <a:t>2/26/2026</a:t>
             </a:fld>
             <a:endParaRPr lang="en-US"/>
           </a:p>
@@ -4388,7 +4388,7 @@
           <a:p>
             <a:fld id="{5BCAD085-E8A6-8845-BD4E-CB4CCA059FC4}" type="datetimeFigureOut">
               <a:rPr lang="en-US" smtClean="0"/>
-              <a:t>2/20/2026</a:t>
+              <a:t>2/26/2026</a:t>
             </a:fld>
             <a:endParaRPr lang="en-US"/>
           </a:p>
@@ -4506,7 +4506,7 @@
           <a:p>
             <a:fld id="{5BCAD085-E8A6-8845-BD4E-CB4CCA059FC4}" type="datetimeFigureOut">
               <a:rPr lang="en-US" smtClean="0"/>
-              <a:t>2/20/2026</a:t>
+              <a:t>2/26/2026</a:t>
             </a:fld>
             <a:endParaRPr lang="en-US"/>
           </a:p>
@@ -4601,7 +4601,7 @@
           <a:p>
             <a:fld id="{5BCAD085-E8A6-8845-BD4E-CB4CCA059FC4}" type="datetimeFigureOut">
               <a:rPr lang="en-US" smtClean="0"/>
-              <a:t>2/20/2026</a:t>
+              <a:t>2/26/2026</a:t>
             </a:fld>
             <a:endParaRPr lang="en-US"/>
           </a:p>
@@ -4880,7 +4880,7 @@
           <a:p>
             <a:fld id="{5BCAD085-E8A6-8845-BD4E-CB4CCA059FC4}" type="datetimeFigureOut">
               <a:rPr lang="en-US" smtClean="0"/>
-              <a:t>2/20/2026</a:t>
+              <a:t>2/26/2026</a:t>
             </a:fld>
             <a:endParaRPr lang="en-US"/>
           </a:p>
@@ -5155,7 +5155,7 @@
           <a:p>
             <a:fld id="{5BCAD085-E8A6-8845-BD4E-CB4CCA059FC4}" type="datetimeFigureOut">
               <a:rPr lang="en-US" smtClean="0"/>
-              <a:t>2/20/2026</a:t>
+              <a:t>2/26/2026</a:t>
             </a:fld>
             <a:endParaRPr lang="en-US"/>
           </a:p>
@@ -5720,7 +5720,7 @@
           <a:p>
             <a:fld id="{5BCAD085-E8A6-8845-BD4E-CB4CCA059FC4}" type="datetimeFigureOut">
               <a:rPr lang="en-US" smtClean="0"/>
-              <a:t>2/20/2026</a:t>
+              <a:t>2/26/2026</a:t>
             </a:fld>
             <a:endParaRPr lang="en-US"/>
           </a:p>
@@ -6781,7 +6781,19 @@
             </a:r>
             <a:r>
               <a:rPr dirty="0"/>
-              <a:t>Detailed use cases &amp; architecture validation</a:t>
+              <a:t>Detailed use cases</a:t>
+            </a:r>
+            <a:r>
+              <a:rPr lang="en-US" dirty="0"/>
+              <a:t> modelling</a:t>
+            </a:r>
+            <a:r>
+              <a:rPr dirty="0"/>
+              <a:t> &amp; </a:t>
+            </a:r>
+            <a:r>
+              <a:rPr lang="en-GB" dirty="0"/>
+              <a:t>System Architecture Design</a:t>
             </a:r>
           </a:p>
           <a:p>
@@ -7427,8 +7439,8 @@
         </p:nvSpPr>
         <p:spPr>
           <a:xfrm>
-            <a:off x="509155" y="1797269"/>
-            <a:ext cx="6974211" cy="3323987"/>
+            <a:off x="999606" y="1534249"/>
+            <a:ext cx="6974211" cy="3877985"/>
           </a:xfrm>
           <a:prstGeom prst="rect">
             <a:avLst/>
@@ -7492,14 +7504,36 @@
           <a:p>
             <a:r>
               <a:rPr lang="en-US" dirty="0"/>
-              <a:t>5. Login User</a:t>
+              <a:t>5. Manage Suppliers / Orders</a:t>
             </a:r>
           </a:p>
           <a:p>
             <a:r>
               <a:rPr lang="en-US" dirty="0"/>
-              <a:t>   - Role-based authentication (Admin, Cashier, Pharmacist)</a:t>
-            </a:r>
+              <a:t>  - Record and track medicine orders from suppliers</a:t>
+            </a:r>
+          </a:p>
+          <a:p>
+            <a:r>
+              <a:rPr lang="en-US" dirty="0"/>
+              <a:t>  - </a:t>
+            </a:r>
+            <a:r>
+              <a:rPr lang="en-GB" dirty="0"/>
+              <a:t>Update inventory upon delivery</a:t>
+            </a:r>
+            <a:endParaRPr lang="en-US" dirty="0"/>
+          </a:p>
+          <a:p>
+            <a:r>
+              <a:rPr lang="en-US" dirty="0"/>
+              <a:t>  - </a:t>
+            </a:r>
+            <a:r>
+              <a:rPr lang="en-GB" dirty="0"/>
+              <a:t>Prevent stockouts</a:t>
+            </a:r>
+            <a:endParaRPr lang="en-US" dirty="0"/>
           </a:p>
         </p:txBody>
       </p:sp>
